--- a/ゲーム科1年/00_前期/ゲームプログラミングⅢ/ゲーム数学/座学/03_直線の性質.pptx
+++ b/ゲーム科1年/00_前期/ゲームプログラミングⅢ/ゲーム数学/座学/03_直線の性質.pptx
@@ -265,7 +265,7 @@
           <a:p>
             <a:fld id="{E9CC885B-4903-4D54-9A93-00025F12DED9}" type="datetimeFigureOut">
               <a:rPr kumimoji="1" lang="ja-JP" altLang="en-US" smtClean="0"/>
-              <a:t>2024/10/3</a:t>
+              <a:t>2025/6/12</a:t>
             </a:fld>
             <a:endParaRPr kumimoji="1" lang="ja-JP" altLang="en-US"/>
           </a:p>
@@ -495,7 +495,7 @@
           <a:p>
             <a:fld id="{E9CC885B-4903-4D54-9A93-00025F12DED9}" type="datetimeFigureOut">
               <a:rPr kumimoji="1" lang="ja-JP" altLang="en-US" smtClean="0"/>
-              <a:t>2024/10/3</a:t>
+              <a:t>2025/6/12</a:t>
             </a:fld>
             <a:endParaRPr kumimoji="1" lang="ja-JP" altLang="en-US"/>
           </a:p>
@@ -735,7 +735,7 @@
           <a:p>
             <a:fld id="{E9CC885B-4903-4D54-9A93-00025F12DED9}" type="datetimeFigureOut">
               <a:rPr kumimoji="1" lang="ja-JP" altLang="en-US" smtClean="0"/>
-              <a:t>2024/10/3</a:t>
+              <a:t>2025/6/12</a:t>
             </a:fld>
             <a:endParaRPr kumimoji="1" lang="ja-JP" altLang="en-US"/>
           </a:p>
@@ -965,7 +965,7 @@
           <a:p>
             <a:fld id="{E9CC885B-4903-4D54-9A93-00025F12DED9}" type="datetimeFigureOut">
               <a:rPr kumimoji="1" lang="ja-JP" altLang="en-US" smtClean="0"/>
-              <a:t>2024/10/3</a:t>
+              <a:t>2025/6/12</a:t>
             </a:fld>
             <a:endParaRPr kumimoji="1" lang="ja-JP" altLang="en-US"/>
           </a:p>
@@ -1240,7 +1240,7 @@
           <a:p>
             <a:fld id="{E9CC885B-4903-4D54-9A93-00025F12DED9}" type="datetimeFigureOut">
               <a:rPr kumimoji="1" lang="ja-JP" altLang="en-US" smtClean="0"/>
-              <a:t>2024/10/3</a:t>
+              <a:t>2025/6/12</a:t>
             </a:fld>
             <a:endParaRPr kumimoji="1" lang="ja-JP" altLang="en-US"/>
           </a:p>
@@ -1569,7 +1569,7 @@
           <a:p>
             <a:fld id="{E9CC885B-4903-4D54-9A93-00025F12DED9}" type="datetimeFigureOut">
               <a:rPr kumimoji="1" lang="ja-JP" altLang="en-US" smtClean="0"/>
-              <a:t>2024/10/3</a:t>
+              <a:t>2025/6/12</a:t>
             </a:fld>
             <a:endParaRPr kumimoji="1" lang="ja-JP" altLang="en-US"/>
           </a:p>
@@ -2045,7 +2045,7 @@
           <a:p>
             <a:fld id="{E9CC885B-4903-4D54-9A93-00025F12DED9}" type="datetimeFigureOut">
               <a:rPr kumimoji="1" lang="ja-JP" altLang="en-US" smtClean="0"/>
-              <a:t>2024/10/3</a:t>
+              <a:t>2025/6/12</a:t>
             </a:fld>
             <a:endParaRPr kumimoji="1" lang="ja-JP" altLang="en-US"/>
           </a:p>
@@ -2186,7 +2186,7 @@
           <a:p>
             <a:fld id="{E9CC885B-4903-4D54-9A93-00025F12DED9}" type="datetimeFigureOut">
               <a:rPr kumimoji="1" lang="ja-JP" altLang="en-US" smtClean="0"/>
-              <a:t>2024/10/3</a:t>
+              <a:t>2025/6/12</a:t>
             </a:fld>
             <a:endParaRPr kumimoji="1" lang="ja-JP" altLang="en-US"/>
           </a:p>
@@ -2299,7 +2299,7 @@
           <a:p>
             <a:fld id="{E9CC885B-4903-4D54-9A93-00025F12DED9}" type="datetimeFigureOut">
               <a:rPr kumimoji="1" lang="ja-JP" altLang="en-US" smtClean="0"/>
-              <a:t>2024/10/3</a:t>
+              <a:t>2025/6/12</a:t>
             </a:fld>
             <a:endParaRPr kumimoji="1" lang="ja-JP" altLang="en-US"/>
           </a:p>
@@ -2642,7 +2642,7 @@
           <a:p>
             <a:fld id="{E9CC885B-4903-4D54-9A93-00025F12DED9}" type="datetimeFigureOut">
               <a:rPr kumimoji="1" lang="ja-JP" altLang="en-US" smtClean="0"/>
-              <a:t>2024/10/3</a:t>
+              <a:t>2025/6/12</a:t>
             </a:fld>
             <a:endParaRPr kumimoji="1" lang="ja-JP" altLang="en-US"/>
           </a:p>
@@ -2930,7 +2930,7 @@
           <a:p>
             <a:fld id="{E9CC885B-4903-4D54-9A93-00025F12DED9}" type="datetimeFigureOut">
               <a:rPr kumimoji="1" lang="ja-JP" altLang="en-US" smtClean="0"/>
-              <a:t>2024/10/3</a:t>
+              <a:t>2025/6/12</a:t>
             </a:fld>
             <a:endParaRPr kumimoji="1" lang="ja-JP" altLang="en-US"/>
           </a:p>
@@ -3203,7 +3203,7 @@
           <a:p>
             <a:fld id="{E9CC885B-4903-4D54-9A93-00025F12DED9}" type="datetimeFigureOut">
               <a:rPr kumimoji="1" lang="ja-JP" altLang="en-US" smtClean="0"/>
-              <a:t>2024/10/3</a:t>
+              <a:t>2025/6/12</a:t>
             </a:fld>
             <a:endParaRPr kumimoji="1" lang="ja-JP" altLang="en-US"/>
           </a:p>
@@ -3622,6 +3622,60 @@
       </p:grpSpPr>
       <p:sp>
         <p:nvSpPr>
+          <p:cNvPr id="2" name="四角形: 角を丸くする 1">
+            <a:extLst>
+              <a:ext uri="{FF2B5EF4-FFF2-40B4-BE49-F238E27FC236}">
+                <a16:creationId xmlns:a16="http://schemas.microsoft.com/office/drawing/2014/main" id="{169B0D5E-EDCD-4A1F-8303-6B242064E875}"/>
+              </a:ext>
+            </a:extLst>
+          </p:cNvPr>
+          <p:cNvSpPr/>
+          <p:nvPr/>
+        </p:nvSpPr>
+        <p:spPr>
+          <a:xfrm>
+            <a:off x="507742" y="1844468"/>
+            <a:ext cx="7129191" cy="1413272"/>
+          </a:xfrm>
+          <a:prstGeom prst="roundRect">
+            <a:avLst/>
+          </a:prstGeom>
+          <a:solidFill>
+            <a:schemeClr val="bg1">
+              <a:lumMod val="85000"/>
+            </a:schemeClr>
+          </a:solidFill>
+          <a:ln>
+            <a:noFill/>
+          </a:ln>
+        </p:spPr>
+        <p:style>
+          <a:lnRef idx="2">
+            <a:schemeClr val="accent1">
+              <a:shade val="50000"/>
+            </a:schemeClr>
+          </a:lnRef>
+          <a:fillRef idx="1">
+            <a:schemeClr val="accent1"/>
+          </a:fillRef>
+          <a:effectRef idx="0">
+            <a:schemeClr val="accent1"/>
+          </a:effectRef>
+          <a:fontRef idx="minor">
+            <a:schemeClr val="lt1"/>
+          </a:fontRef>
+        </p:style>
+        <p:txBody>
+          <a:bodyPr rtlCol="0" anchor="ctr"/>
+          <a:lstStyle/>
+          <a:p>
+            <a:pPr algn="ctr"/>
+            <a:endParaRPr kumimoji="1" lang="ja-JP" altLang="en-US"/>
+          </a:p>
+        </p:txBody>
+      </p:sp>
+      <p:sp>
+        <p:nvSpPr>
           <p:cNvPr id="4" name="テキスト ボックス 3">
             <a:extLst>
               <a:ext uri="{FF2B5EF4-FFF2-40B4-BE49-F238E27FC236}">
@@ -3659,8 +3713,8 @@
           </a:p>
         </p:txBody>
       </p:sp>
-      <mc:AlternateContent xmlns:mc="http://schemas.openxmlformats.org/markup-compatibility/2006">
-        <mc:Choice xmlns:a14="http://schemas.microsoft.com/office/drawing/2010/main" Requires="a14">
+      <mc:AlternateContent xmlns:mc="http://schemas.openxmlformats.org/markup-compatibility/2006" xmlns:a14="http://schemas.microsoft.com/office/drawing/2010/main">
+        <mc:Choice Requires="a14">
           <p:sp>
             <p:nvSpPr>
               <p:cNvPr id="6" name="テキスト ボックス 5">
@@ -3846,7 +3900,6 @@
                 </a:endParaRPr>
               </a:p>
               <a:p>
-                <a:pPr/>
                 <a14:m>
                   <m:oMath xmlns:m="http://schemas.openxmlformats.org/officeDocument/2006/math">
                     <m:sSub>
@@ -3958,7 +4011,7 @@
             </p:txBody>
           </p:sp>
         </mc:Choice>
-        <mc:Fallback>
+        <mc:Fallback xmlns="">
           <p:sp>
             <p:nvSpPr>
               <p:cNvPr id="6" name="テキスト ボックス 5">
@@ -4214,8 +4267,8 @@
               </p:style>
             </p:cxnSp>
           </p:grpSp>
-          <mc:AlternateContent xmlns:mc="http://schemas.openxmlformats.org/markup-compatibility/2006">
-            <mc:Choice xmlns:a14="http://schemas.microsoft.com/office/drawing/2010/main" Requires="a14">
+          <mc:AlternateContent xmlns:mc="http://schemas.openxmlformats.org/markup-compatibility/2006" xmlns:a14="http://schemas.microsoft.com/office/drawing/2010/main">
+            <mc:Choice Requires="a14">
               <p:sp>
                 <p:nvSpPr>
                   <p:cNvPr id="63" name="テキスト ボックス 62">
@@ -4310,7 +4363,7 @@
                 </p:txBody>
               </p:sp>
             </mc:Choice>
-            <mc:Fallback>
+            <mc:Fallback xmlns="">
               <p:sp>
                 <p:nvSpPr>
                   <p:cNvPr id="63" name="テキスト ボックス 62">
@@ -4355,8 +4408,8 @@
               </p:sp>
             </mc:Fallback>
           </mc:AlternateContent>
-          <mc:AlternateContent xmlns:mc="http://schemas.openxmlformats.org/markup-compatibility/2006">
-            <mc:Choice xmlns:a14="http://schemas.microsoft.com/office/drawing/2010/main" Requires="a14">
+          <mc:AlternateContent xmlns:mc="http://schemas.openxmlformats.org/markup-compatibility/2006" xmlns:a14="http://schemas.microsoft.com/office/drawing/2010/main">
+            <mc:Choice Requires="a14">
               <p:sp>
                 <p:nvSpPr>
                   <p:cNvPr id="64" name="テキスト ボックス 63">
@@ -4426,7 +4479,7 @@
                 </p:txBody>
               </p:sp>
             </mc:Choice>
-            <mc:Fallback>
+            <mc:Fallback xmlns="">
               <p:sp>
                 <p:nvSpPr>
                   <p:cNvPr id="64" name="テキスト ボックス 63">
@@ -4472,8 +4525,8 @@
             </mc:Fallback>
           </mc:AlternateContent>
         </p:grpSp>
-        <mc:AlternateContent xmlns:mc="http://schemas.openxmlformats.org/markup-compatibility/2006">
-          <mc:Choice xmlns:a14="http://schemas.microsoft.com/office/drawing/2010/main" Requires="a14">
+        <mc:AlternateContent xmlns:mc="http://schemas.openxmlformats.org/markup-compatibility/2006" xmlns:a14="http://schemas.microsoft.com/office/drawing/2010/main">
+          <mc:Choice Requires="a14">
             <p:sp>
               <p:nvSpPr>
                 <p:cNvPr id="73" name="テキスト ボックス 72">
@@ -4531,7 +4584,7 @@
               </p:txBody>
             </p:sp>
           </mc:Choice>
-          <mc:Fallback>
+          <mc:Fallback xmlns="">
             <p:sp>
               <p:nvSpPr>
                 <p:cNvPr id="73" name="テキスト ボックス 72">
@@ -4985,10 +5038,18 @@
               </a:p>
               <a:p>
                 <a:r>
-                  <a:rPr kumimoji="1" lang="ja-JP" altLang="en-US" sz="2400" dirty="0"/>
+                  <a:rPr kumimoji="1" lang="ja-JP" altLang="en-US" sz="2400" b="1" dirty="0">
+                    <a:solidFill>
+                      <a:srgbClr val="FF0000"/>
+                    </a:solidFill>
+                  </a:rPr>
                   <a:t>■解答</a:t>
                 </a:r>
-                <a:endParaRPr kumimoji="1" lang="en-US" altLang="ja-JP" sz="2400" dirty="0"/>
+                <a:endParaRPr kumimoji="1" lang="en-US" altLang="ja-JP" sz="2400" b="1" dirty="0">
+                  <a:solidFill>
+                    <a:srgbClr val="FF0000"/>
+                  </a:solidFill>
+                </a:endParaRPr>
               </a:p>
               <a:p>
                 <a:pPr/>
@@ -5271,11 +5332,9 @@
                 <a:endParaRPr kumimoji="1" lang="en-US" altLang="ja-JP" sz="2400" b="1" dirty="0"/>
               </a:p>
               <a:p>
-                <a:pPr/>
                 <a:endParaRPr kumimoji="1" lang="en-US" altLang="ja-JP" sz="2400" dirty="0"/>
               </a:p>
               <a:p>
-                <a:pPr/>
                 <a:r>
                   <a:rPr lang="ja-JP" altLang="en-US" sz="2400" dirty="0"/>
                   <a:t>やはり</a:t>
@@ -5444,8 +5503,8 @@
           </a:p>
         </p:txBody>
       </p:sp>
-      <mc:AlternateContent xmlns:mc="http://schemas.openxmlformats.org/markup-compatibility/2006">
-        <mc:Choice xmlns:a14="http://schemas.microsoft.com/office/drawing/2010/main" Requires="a14">
+      <mc:AlternateContent xmlns:mc="http://schemas.openxmlformats.org/markup-compatibility/2006" xmlns:a14="http://schemas.microsoft.com/office/drawing/2010/main">
+        <mc:Choice Requires="a14">
           <p:sp>
             <p:nvSpPr>
               <p:cNvPr id="6" name="テキスト ボックス 5">
@@ -5532,7 +5591,7 @@
             </p:txBody>
           </p:sp>
         </mc:Choice>
-        <mc:Fallback>
+        <mc:Fallback xmlns="">
           <p:sp>
             <p:nvSpPr>
               <p:cNvPr id="6" name="テキスト ボックス 5">
@@ -5669,8 +5728,8 @@
             </a:fontRef>
           </p:style>
         </p:cxnSp>
-        <mc:AlternateContent xmlns:mc="http://schemas.openxmlformats.org/markup-compatibility/2006">
-          <mc:Choice xmlns:a14="http://schemas.microsoft.com/office/drawing/2010/main" Requires="a14">
+        <mc:AlternateContent xmlns:mc="http://schemas.openxmlformats.org/markup-compatibility/2006" xmlns:a14="http://schemas.microsoft.com/office/drawing/2010/main">
+          <mc:Choice Requires="a14">
             <p:sp>
               <p:nvSpPr>
                 <p:cNvPr id="8" name="テキスト ボックス 7">
@@ -5740,7 +5799,7 @@
               </p:txBody>
             </p:sp>
           </mc:Choice>
-          <mc:Fallback>
+          <mc:Fallback xmlns="">
             <p:sp>
               <p:nvSpPr>
                 <p:cNvPr id="8" name="テキスト ボックス 7">
@@ -5785,8 +5844,8 @@
             </p:sp>
           </mc:Fallback>
         </mc:AlternateContent>
-        <mc:AlternateContent xmlns:mc="http://schemas.openxmlformats.org/markup-compatibility/2006">
-          <mc:Choice xmlns:a14="http://schemas.microsoft.com/office/drawing/2010/main" Requires="a14">
+        <mc:AlternateContent xmlns:mc="http://schemas.openxmlformats.org/markup-compatibility/2006" xmlns:a14="http://schemas.microsoft.com/office/drawing/2010/main">
+          <mc:Choice Requires="a14">
             <p:sp>
               <p:nvSpPr>
                 <p:cNvPr id="9" name="テキスト ボックス 8">
@@ -5856,7 +5915,7 @@
               </p:txBody>
             </p:sp>
           </mc:Choice>
-          <mc:Fallback>
+          <mc:Fallback xmlns="">
             <p:sp>
               <p:nvSpPr>
                 <p:cNvPr id="9" name="テキスト ボックス 8">
@@ -5902,8 +5961,8 @@
           </mc:Fallback>
         </mc:AlternateContent>
       </p:grpSp>
-      <mc:AlternateContent xmlns:mc="http://schemas.openxmlformats.org/markup-compatibility/2006">
-        <mc:Choice xmlns:a14="http://schemas.microsoft.com/office/drawing/2010/main" Requires="a14">
+      <mc:AlternateContent xmlns:mc="http://schemas.openxmlformats.org/markup-compatibility/2006" xmlns:a14="http://schemas.microsoft.com/office/drawing/2010/main">
+        <mc:Choice Requires="a14">
           <p:sp>
             <p:nvSpPr>
               <p:cNvPr id="10" name="テキスト ボックス 9">
@@ -5971,7 +6030,7 @@
             </p:txBody>
           </p:sp>
         </mc:Choice>
-        <mc:Fallback>
+        <mc:Fallback xmlns="">
           <p:sp>
             <p:nvSpPr>
               <p:cNvPr id="10" name="テキスト ボックス 9">
@@ -6085,8 +6144,8 @@
           </a:p>
         </p:txBody>
       </p:sp>
-      <mc:AlternateContent xmlns:mc="http://schemas.openxmlformats.org/markup-compatibility/2006">
-        <mc:Choice xmlns:a14="http://schemas.microsoft.com/office/drawing/2010/main" Requires="a14">
+      <mc:AlternateContent xmlns:mc="http://schemas.openxmlformats.org/markup-compatibility/2006" xmlns:a14="http://schemas.microsoft.com/office/drawing/2010/main">
+        <mc:Choice Requires="a14">
           <p:sp>
             <p:nvSpPr>
               <p:cNvPr id="6" name="テキスト ボックス 5">
@@ -6188,7 +6247,7 @@
             </p:txBody>
           </p:sp>
         </mc:Choice>
-        <mc:Fallback>
+        <mc:Fallback xmlns="">
           <p:sp>
             <p:nvSpPr>
               <p:cNvPr id="6" name="テキスト ボックス 5">
@@ -6327,8 +6386,8 @@
             </a:fontRef>
           </p:style>
         </p:cxnSp>
-        <mc:AlternateContent xmlns:mc="http://schemas.openxmlformats.org/markup-compatibility/2006">
-          <mc:Choice xmlns:a14="http://schemas.microsoft.com/office/drawing/2010/main" Requires="a14">
+        <mc:AlternateContent xmlns:mc="http://schemas.openxmlformats.org/markup-compatibility/2006" xmlns:a14="http://schemas.microsoft.com/office/drawing/2010/main">
+          <mc:Choice Requires="a14">
             <p:sp>
               <p:nvSpPr>
                 <p:cNvPr id="14" name="テキスト ボックス 13">
@@ -6404,7 +6463,7 @@
               </p:txBody>
             </p:sp>
           </mc:Choice>
-          <mc:Fallback>
+          <mc:Fallback xmlns="">
             <p:sp>
               <p:nvSpPr>
                 <p:cNvPr id="14" name="テキスト ボックス 13">
@@ -6696,13 +6755,20 @@
               </a:p>
               <a:p>
                 <a:r>
-                  <a:rPr kumimoji="1" lang="ja-JP" altLang="en-US" sz="2400" dirty="0"/>
+                  <a:rPr kumimoji="1" lang="ja-JP" altLang="en-US" sz="2400" b="1" dirty="0">
+                    <a:solidFill>
+                      <a:srgbClr val="FF0000"/>
+                    </a:solidFill>
+                  </a:rPr>
                   <a:t>■解答</a:t>
                 </a:r>
-                <a:endParaRPr kumimoji="1" lang="en-US" altLang="ja-JP" sz="2400" dirty="0"/>
+                <a:endParaRPr kumimoji="1" lang="en-US" altLang="ja-JP" sz="2400" b="1" dirty="0">
+                  <a:solidFill>
+                    <a:srgbClr val="FF0000"/>
+                  </a:solidFill>
+                </a:endParaRPr>
               </a:p>
               <a:p>
-                <a:pPr/>
                 <a14:m>
                   <m:oMath xmlns:m="http://schemas.openxmlformats.org/officeDocument/2006/math">
                     <m:r>
@@ -6770,7 +6836,6 @@
                 <a:endParaRPr kumimoji="1" lang="en-US" altLang="ja-JP" sz="2400" dirty="0"/>
               </a:p>
               <a:p>
-                <a:pPr/>
                 <a14:m>
                   <m:oMath xmlns:m="http://schemas.openxmlformats.org/officeDocument/2006/math">
                     <m:r>
@@ -6816,11 +6881,9 @@
                 <a:endParaRPr kumimoji="1" lang="en-US" altLang="ja-JP" sz="2400" dirty="0"/>
               </a:p>
               <a:p>
-                <a:pPr/>
                 <a:endParaRPr lang="en-US" altLang="ja-JP" sz="2400" dirty="0"/>
               </a:p>
               <a:p>
-                <a:pPr/>
                 <a:r>
                   <a:rPr kumimoji="1" lang="ja-JP" altLang="en-US" sz="2400" dirty="0"/>
                   <a:t>①を</a:t>
@@ -7063,7 +7126,6 @@
                 <a:endParaRPr kumimoji="1" lang="en-US" altLang="ja-JP" sz="2400" dirty="0"/>
               </a:p>
               <a:p>
-                <a:pPr/>
                 <a14:m>
                   <m:oMath xmlns:m="http://schemas.openxmlformats.org/officeDocument/2006/math">
                     <m:r>
@@ -7330,13 +7392,20 @@
               </a:p>
               <a:p>
                 <a:r>
-                  <a:rPr kumimoji="1" lang="ja-JP" altLang="en-US" sz="2400" dirty="0"/>
+                  <a:rPr kumimoji="1" lang="ja-JP" altLang="en-US" sz="2400" b="1" dirty="0">
+                    <a:solidFill>
+                      <a:srgbClr val="FF0000"/>
+                    </a:solidFill>
+                  </a:rPr>
                   <a:t>■解答（つづき）</a:t>
                 </a:r>
-                <a:endParaRPr kumimoji="1" lang="en-US" altLang="ja-JP" sz="2400" dirty="0"/>
+                <a:endParaRPr kumimoji="1" lang="en-US" altLang="ja-JP" sz="2400" b="1" dirty="0">
+                  <a:solidFill>
+                    <a:srgbClr val="FF0000"/>
+                  </a:solidFill>
+                </a:endParaRPr>
               </a:p>
               <a:p>
-                <a:pPr/>
                 <a14:m>
                   <m:oMath xmlns:m="http://schemas.openxmlformats.org/officeDocument/2006/math">
                     <m:r>
@@ -7468,7 +7537,6 @@
                 <a:endParaRPr kumimoji="1" lang="en-US" altLang="ja-JP" sz="2400" b="0" dirty="0"/>
               </a:p>
               <a:p>
-                <a:pPr/>
                 <a14:m>
                   <m:oMath xmlns:m="http://schemas.openxmlformats.org/officeDocument/2006/math">
                     <m:r>
@@ -7496,11 +7564,9 @@
                 <a:endParaRPr kumimoji="1" lang="en-US" altLang="ja-JP" sz="2400" dirty="0"/>
               </a:p>
               <a:p>
-                <a:pPr/>
                 <a:endParaRPr lang="en-US" altLang="ja-JP" sz="2400" dirty="0"/>
               </a:p>
               <a:p>
-                <a:pPr/>
                 <a:r>
                   <a:rPr kumimoji="1" lang="ja-JP" altLang="en-US" sz="2400" dirty="0"/>
                   <a:t>②③より交わる座標は</a:t>
@@ -7677,8 +7743,8 @@
           </a:p>
         </p:txBody>
       </p:sp>
-      <mc:AlternateContent xmlns:mc="http://schemas.openxmlformats.org/markup-compatibility/2006">
-        <mc:Choice xmlns:a14="http://schemas.microsoft.com/office/drawing/2010/main" Requires="a14">
+      <mc:AlternateContent xmlns:mc="http://schemas.openxmlformats.org/markup-compatibility/2006" xmlns:a14="http://schemas.microsoft.com/office/drawing/2010/main">
+        <mc:Choice Requires="a14">
           <p:sp>
             <p:nvSpPr>
               <p:cNvPr id="6" name="テキスト ボックス 5">
@@ -8034,7 +8100,7 @@
             </p:txBody>
           </p:sp>
         </mc:Choice>
-        <mc:Fallback>
+        <mc:Fallback xmlns="">
           <p:sp>
             <p:nvSpPr>
               <p:cNvPr id="6" name="テキスト ボックス 5">
